--- a/shiny_share/shiny_app_documentation.pptx
+++ b/shiny_share/shiny_app_documentation.pptx
@@ -272,7 +272,7 @@
             <a:fld id="{C32BD08D-DEF6-E541-B0BE-E05AC43599B5}" type="datetimeFigureOut">
               <a:rPr lang="en-CN" smtClean="0"/>
               <a:pPr/>
-              <a:t>2026/2/27</a:t>
+              <a:t>2026/2/28</a:t>
             </a:fld>
             <a:endParaRPr lang="en-CN" dirty="0"/>
           </a:p>
@@ -531,7 +531,7 @@
             <a:fld id="{003BF965-7F94-684D-8300-8DE582DA0C17}" type="slidenum">
               <a:rPr lang="en-CN" smtClean="0"/>
               <a:pPr/>
-              <a:t>4</a:t>
+              <a:t>2</a:t>
             </a:fld>
             <a:endParaRPr lang="en-CN" dirty="0"/>
           </a:p>
@@ -540,7 +540,7 @@
     </p:spTree>
     <p:extLst>
       <p:ext uri="{BB962C8B-B14F-4D97-AF65-F5344CB8AC3E}">
-        <p14:creationId xmlns:p14="http://schemas.microsoft.com/office/powerpoint/2010/main" val="2714691307"/>
+        <p14:creationId xmlns:p14="http://schemas.microsoft.com/office/powerpoint/2010/main" val="2491393777"/>
       </p:ext>
     </p:extLst>
   </p:cSld>
@@ -616,7 +616,7 @@
             <a:fld id="{003BF965-7F94-684D-8300-8DE582DA0C17}" type="slidenum">
               <a:rPr lang="en-CN" smtClean="0"/>
               <a:pPr/>
-              <a:t>10</a:t>
+              <a:t>4</a:t>
             </a:fld>
             <a:endParaRPr lang="en-CN" dirty="0"/>
           </a:p>
@@ -625,7 +625,7 @@
     </p:spTree>
     <p:extLst>
       <p:ext uri="{BB962C8B-B14F-4D97-AF65-F5344CB8AC3E}">
-        <p14:creationId xmlns:p14="http://schemas.microsoft.com/office/powerpoint/2010/main" val="2569384929"/>
+        <p14:creationId xmlns:p14="http://schemas.microsoft.com/office/powerpoint/2010/main" val="2714691307"/>
       </p:ext>
     </p:extLst>
   </p:cSld>
@@ -701,6 +701,91 @@
             <a:fld id="{003BF965-7F94-684D-8300-8DE582DA0C17}" type="slidenum">
               <a:rPr lang="en-CN" smtClean="0"/>
               <a:pPr/>
+              <a:t>10</a:t>
+            </a:fld>
+            <a:endParaRPr lang="en-CN" dirty="0"/>
+          </a:p>
+        </p:txBody>
+      </p:sp>
+    </p:spTree>
+    <p:extLst>
+      <p:ext uri="{BB962C8B-B14F-4D97-AF65-F5344CB8AC3E}">
+        <p14:creationId xmlns:p14="http://schemas.microsoft.com/office/powerpoint/2010/main" val="2569384929"/>
+      </p:ext>
+    </p:extLst>
+  </p:cSld>
+  <p:clrMapOvr>
+    <a:masterClrMapping/>
+  </p:clrMapOvr>
+</p:notes>
+</file>
+
+<file path=ppt/notesSlides/notesSlide4.xml><?xml version="1.0" encoding="utf-8"?>
+<p:notes xmlns:a="http://schemas.openxmlformats.org/drawingml/2006/main" xmlns:r="http://schemas.openxmlformats.org/officeDocument/2006/relationships" xmlns:p="http://schemas.openxmlformats.org/presentationml/2006/main">
+  <p:cSld>
+    <p:spTree>
+      <p:nvGrpSpPr>
+        <p:cNvPr id="1" name=""/>
+        <p:cNvGrpSpPr/>
+        <p:nvPr/>
+      </p:nvGrpSpPr>
+      <p:grpSpPr>
+        <a:xfrm>
+          <a:off x="0" y="0"/>
+          <a:ext cx="0" cy="0"/>
+          <a:chOff x="0" y="0"/>
+          <a:chExt cx="0" cy="0"/>
+        </a:xfrm>
+      </p:grpSpPr>
+      <p:sp>
+        <p:nvSpPr>
+          <p:cNvPr id="2" name="Slide Image Placeholder 1"/>
+          <p:cNvSpPr>
+            <a:spLocks noGrp="1" noRot="1" noChangeAspect="1"/>
+          </p:cNvSpPr>
+          <p:nvPr>
+            <p:ph type="sldImg"/>
+          </p:nvPr>
+        </p:nvSpPr>
+        <p:spPr/>
+      </p:sp>
+      <p:sp>
+        <p:nvSpPr>
+          <p:cNvPr id="3" name="Notes Placeholder 2"/>
+          <p:cNvSpPr>
+            <a:spLocks noGrp="1"/>
+          </p:cNvSpPr>
+          <p:nvPr>
+            <p:ph type="body" idx="1"/>
+          </p:nvPr>
+        </p:nvSpPr>
+        <p:spPr/>
+        <p:txBody>
+          <a:bodyPr/>
+          <a:lstStyle/>
+          <a:p>
+            <a:endParaRPr lang="en-CN" dirty="0"/>
+          </a:p>
+        </p:txBody>
+      </p:sp>
+      <p:sp>
+        <p:nvSpPr>
+          <p:cNvPr id="4" name="Slide Number Placeholder 3"/>
+          <p:cNvSpPr>
+            <a:spLocks noGrp="1"/>
+          </p:cNvSpPr>
+          <p:nvPr>
+            <p:ph type="sldNum" sz="quarter" idx="5"/>
+          </p:nvPr>
+        </p:nvSpPr>
+        <p:spPr/>
+        <p:txBody>
+          <a:bodyPr/>
+          <a:lstStyle/>
+          <a:p>
+            <a:fld id="{003BF965-7F94-684D-8300-8DE582DA0C17}" type="slidenum">
+              <a:rPr lang="en-CN" smtClean="0"/>
+              <a:pPr/>
               <a:t>57</a:t>
             </a:fld>
             <a:endParaRPr lang="en-CN" dirty="0"/>
@@ -720,7 +805,7 @@
 </p:notes>
 </file>
 
-<file path=ppt/notesSlides/notesSlide4.xml><?xml version="1.0" encoding="utf-8"?>
+<file path=ppt/notesSlides/notesSlide5.xml><?xml version="1.0" encoding="utf-8"?>
 <p:notes xmlns:a="http://schemas.openxmlformats.org/drawingml/2006/main" xmlns:r="http://schemas.openxmlformats.org/officeDocument/2006/relationships" xmlns:p="http://schemas.openxmlformats.org/presentationml/2006/main">
   <p:cSld>
     <p:spTree>
@@ -7887,39 +7972,65 @@
               <a:buNone/>
             </a:pPr>
             <a:r>
-              <a:rPr b="1"/>
-              <a:t>系统架构：</a:t>
+              <a:rPr b="1" dirty="0" err="1"/>
+              <a:t>系统架构</a:t>
+            </a:r>
+            <a:r>
+              <a:rPr b="1" dirty="0"/>
+              <a:t>：</a:t>
             </a:r>
           </a:p>
           <a:p>
             <a:pPr lvl="0"/>
             <a:r>
-              <a:rPr b="1"/>
+              <a:rPr b="1" dirty="0" err="1"/>
               <a:t>前端</a:t>
             </a:r>
             <a:r>
-              <a:t>：Shiny UI界面，包含输入表单和结果展示</a:t>
-            </a:r>
+              <a:rPr dirty="0" err="1"/>
+              <a:t>：Shiny</a:t>
+            </a:r>
+            <a:r>
+              <a:rPr dirty="0"/>
+              <a:t> </a:t>
+            </a:r>
+            <a:r>
+              <a:rPr dirty="0" err="1"/>
+              <a:t>UI界面，包含输入表单和结果展示</a:t>
+            </a:r>
+            <a:endParaRPr dirty="0"/>
           </a:p>
           <a:p>
             <a:pPr lvl="0"/>
             <a:r>
-              <a:rPr b="1"/>
+              <a:rPr b="1" dirty="0" err="1"/>
               <a:t>后端</a:t>
             </a:r>
             <a:r>
-              <a:t>：Shiny Server，处理业务逻辑和模型预测</a:t>
-            </a:r>
+              <a:rPr dirty="0" err="1"/>
+              <a:t>：Shiny</a:t>
+            </a:r>
+            <a:r>
+              <a:rPr dirty="0"/>
+              <a:t> </a:t>
+            </a:r>
+            <a:r>
+              <a:rPr dirty="0" err="1"/>
+              <a:t>Server，处理业务逻辑和模型预测</a:t>
+            </a:r>
+            <a:endParaRPr dirty="0"/>
           </a:p>
           <a:p>
             <a:pPr lvl="0"/>
             <a:r>
-              <a:rPr b="1"/>
+              <a:rPr b="1" dirty="0" err="1"/>
               <a:t>数据层</a:t>
             </a:r>
             <a:r>
+              <a:rPr dirty="0" err="1"/>
               <a:t>：预训练的XGBoost模型和特征配置</a:t>
             </a:r>
+            <a:endParaRPr dirty="0"/>
           </a:p>
         </p:txBody>
       </p:sp>
@@ -8507,6 +8618,7 @@
               <a:buNone/>
             </a:pPr>
             <a:r>
+              <a:rPr b="1" dirty="0"/>
               <a:t>Table of contents</a:t>
             </a:r>
           </a:p>
@@ -8532,18 +8644,9 @@
             <a:pPr lvl="0"/>
             <a:r>
               <a:rPr>
-                <a:hlinkClick r:id="rId2" action="ppaction://hlinksldjump"/>
+                <a:hlinkClick r:id="rId3" action="ppaction://hlinksldjump"/>
               </a:rPr>
               <a:t>1. Shiny简介</a:t>
-            </a:r>
-          </a:p>
-          <a:p>
-            <a:pPr lvl="0"/>
-            <a:r>
-              <a:rPr>
-                <a:hlinkClick r:id="rId3" action="ppaction://hlinksldjump"/>
-              </a:rPr>
-              <a:t>2. 应用顶层设计</a:t>
             </a:r>
           </a:p>
           <a:p>
@@ -8552,7 +8655,7 @@
               <a:rPr>
                 <a:hlinkClick r:id="rId4" action="ppaction://hlinksldjump"/>
               </a:rPr>
-              <a:t>3. 技术架构设计</a:t>
+              <a:t>2. 应用顶层设计</a:t>
             </a:r>
           </a:p>
           <a:p>
@@ -8561,7 +8664,7 @@
               <a:rPr>
                 <a:hlinkClick r:id="rId5" action="ppaction://hlinksldjump"/>
               </a:rPr>
-              <a:t>4. 详细设计与实现</a:t>
+              <a:t>3. 技术架构设计</a:t>
             </a:r>
           </a:p>
           <a:p>
@@ -8570,7 +8673,7 @@
               <a:rPr>
                 <a:hlinkClick r:id="rId6" action="ppaction://hlinksldjump"/>
               </a:rPr>
-              <a:t>5. 部署与运维设计</a:t>
+              <a:t>4. 详细设计与实现</a:t>
             </a:r>
           </a:p>
           <a:p>
@@ -8579,7 +8682,7 @@
               <a:rPr>
                 <a:hlinkClick r:id="rId7" action="ppaction://hlinksldjump"/>
               </a:rPr>
-              <a:t>6. Vibe Coding开发范式</a:t>
+              <a:t>5. 部署与运维设计</a:t>
             </a:r>
           </a:p>
           <a:p>
@@ -8587,6 +8690,15 @@
             <a:r>
               <a:rPr>
                 <a:hlinkClick r:id="rId8" action="ppaction://hlinksldjump"/>
+              </a:rPr>
+              <a:t>6. Vibe Coding开发范式</a:t>
+            </a:r>
+          </a:p>
+          <a:p>
+            <a:pPr lvl="0"/>
+            <a:r>
+              <a:rPr>
+                <a:hlinkClick r:id="rId9" action="ppaction://hlinksldjump"/>
               </a:rPr>
               <a:t>7. 参考资料</a:t>
             </a:r>
@@ -9556,7 +9668,7 @@
         <p:spPr/>
         <p:txBody>
           <a:bodyPr>
-            <a:normAutofit lnSpcReduction="10000"/>
+            <a:normAutofit fontScale="92500"/>
           </a:bodyPr>
           <a:lstStyle/>
           <a:p>
@@ -9564,17 +9676,22 @@
               <a:buNone/>
             </a:pPr>
             <a:r>
-              <a:rPr b="1"/>
-              <a:t>数据流程设计：</a:t>
+              <a:rPr b="1" dirty="0" err="1"/>
+              <a:t>数据流程设计</a:t>
+            </a:r>
+            <a:r>
+              <a:rPr b="1" dirty="0"/>
+              <a:t>：</a:t>
             </a:r>
           </a:p>
           <a:p>
             <a:pPr lvl="0"/>
             <a:r>
-              <a:rPr b="1"/>
+              <a:rPr b="1" dirty="0" err="1"/>
               <a:t>数据流向</a:t>
             </a:r>
             <a:r>
+              <a:rPr dirty="0"/>
               <a:t>：</a:t>
             </a:r>
           </a:p>
@@ -9583,23 +9700,57 @@
               <a:buAutoNum type="arabicPeriod"/>
             </a:pPr>
             <a:r>
-              <a:rPr b="1"/>
+              <a:rPr b="1" dirty="0" err="1"/>
               <a:t>输入阶段</a:t>
             </a:r>
             <a:r>
+              <a:rPr dirty="0" err="1"/>
               <a:t>：用户通过UI输入参数</a:t>
             </a:r>
+            <a:endParaRPr dirty="0"/>
           </a:p>
           <a:p>
             <a:pPr marL="685800" lvl="1" indent="-342900">
               <a:buAutoNum type="arabicPeriod"/>
             </a:pPr>
             <a:r>
-              <a:rPr b="1"/>
+              <a:rPr b="1" dirty="0" err="1"/>
               <a:t>处理阶段</a:t>
             </a:r>
             <a:r>
+              <a:rPr dirty="0" err="1"/>
               <a:t>：Server接收输入，构建特征向量</a:t>
+            </a:r>
+            <a:endParaRPr dirty="0"/>
+          </a:p>
+          <a:p>
+            <a:pPr marL="685800" lvl="1" indent="-342900">
+              <a:buFont typeface="Arial"/>
+              <a:buAutoNum type="arabicPeriod"/>
+            </a:pPr>
+            <a:r>
+              <a:rPr b="1" dirty="0" err="1"/>
+              <a:t>解释阶段</a:t>
+            </a:r>
+            <a:r>
+              <a:rPr dirty="0" err="1"/>
+              <a:t>：计算SHAP</a:t>
+            </a:r>
+            <a:r>
+              <a:rPr lang="zh-CN" altLang="en-US" b="1" dirty="0"/>
+              <a:t>预测阶段</a:t>
+            </a:r>
+            <a:r>
+              <a:rPr lang="zh-CN" altLang="en-US" dirty="0"/>
+              <a:t>：调用</a:t>
+            </a:r>
+            <a:r>
+              <a:rPr lang="en-US" dirty="0" err="1"/>
+              <a:t>XGBoost</a:t>
+            </a:r>
+            <a:r>
+              <a:rPr lang="zh-CN" altLang="en-US" dirty="0"/>
+              <a:t>模型生成预测</a:t>
             </a:r>
           </a:p>
           <a:p>
@@ -9607,36 +9758,24 @@
               <a:buAutoNum type="arabicPeriod"/>
             </a:pPr>
             <a:r>
-              <a:rPr b="1"/>
-              <a:t>预测阶段</a:t>
-            </a:r>
-            <a:r>
-              <a:t>：调用XGBoost模型生成预测</a:t>
-            </a:r>
+              <a:rPr dirty="0" err="1"/>
+              <a:t>值，生成解释</a:t>
+            </a:r>
+            <a:endParaRPr dirty="0"/>
           </a:p>
           <a:p>
             <a:pPr marL="685800" lvl="1" indent="-342900">
               <a:buAutoNum type="arabicPeriod"/>
             </a:pPr>
             <a:r>
-              <a:rPr b="1"/>
-              <a:t>解释阶段</a:t>
-            </a:r>
-            <a:r>
-              <a:t>：计算SHAP值，生成解释</a:t>
-            </a:r>
-          </a:p>
-          <a:p>
-            <a:pPr marL="685800" lvl="1" indent="-342900">
-              <a:buAutoNum type="arabicPeriod"/>
-            </a:pPr>
-            <a:r>
-              <a:rPr b="1"/>
+              <a:rPr b="1" dirty="0" err="1"/>
               <a:t>输出阶段</a:t>
             </a:r>
             <a:r>
+              <a:rPr dirty="0" err="1"/>
               <a:t>：将结果和解释返回给UI展示</a:t>
             </a:r>
+            <a:endParaRPr dirty="0"/>
           </a:p>
         </p:txBody>
       </p:sp>
@@ -9738,37 +9877,51 @@
               <a:buNone/>
             </a:pPr>
             <a:r>
-              <a:rPr b="1"/>
-              <a:t>数据流程设计：</a:t>
+              <a:rPr b="1" dirty="0" err="1"/>
+              <a:t>数据流程设计</a:t>
+            </a:r>
+            <a:r>
+              <a:rPr b="1" dirty="0"/>
+              <a:t>：</a:t>
             </a:r>
           </a:p>
           <a:p>
             <a:pPr lvl="0"/>
             <a:r>
-              <a:rPr b="1"/>
+              <a:rPr b="1" dirty="0" err="1"/>
               <a:t>数据处理流程</a:t>
             </a:r>
             <a:r>
+              <a:rPr dirty="0"/>
               <a:t>：</a:t>
             </a:r>
           </a:p>
           <a:p>
             <a:pPr lvl="1"/>
             <a:r>
+              <a:rPr dirty="0" err="1"/>
               <a:t>数值变量：直接使用用户输入值</a:t>
             </a:r>
+            <a:endParaRPr dirty="0"/>
           </a:p>
           <a:p>
             <a:pPr lvl="1"/>
             <a:r>
+              <a:rPr dirty="0" err="1"/>
+              <a:t>特征顺序：严格按照</a:t>
+            </a:r>
+            <a:r>
+              <a:rPr lang="zh-CN" altLang="en-US" dirty="0"/>
               <a:t>分类变量：进行独热编码转换</a:t>
             </a:r>
           </a:p>
           <a:p>
             <a:pPr lvl="1"/>
             <a:r>
-              <a:t>特征顺序：严格按照模型训练时的顺序</a:t>
-            </a:r>
+              <a:rPr dirty="0" err="1"/>
+              <a:t>模型训练时的顺序</a:t>
+            </a:r>
+            <a:endParaRPr dirty="0"/>
           </a:p>
         </p:txBody>
       </p:sp>
@@ -11463,9 +11616,14 @@
               <a:buNone/>
             </a:pPr>
             <a:r>
-              <a:rPr b="1"/>
-              <a:t>4.4 服务器逻辑设计</a:t>
-            </a:r>
+              <a:rPr b="1" dirty="0"/>
+              <a:t>4.4 </a:t>
+            </a:r>
+            <a:r>
+              <a:rPr b="1" dirty="0" err="1"/>
+              <a:t>服务器逻辑设计</a:t>
+            </a:r>
+            <a:endParaRPr b="1" dirty="0"/>
           </a:p>
         </p:txBody>
       </p:sp>
@@ -11540,11 +11698,12 @@
               <a:rPr sz="1200" dirty="0" err="1">
                 <a:ea typeface="Microsoft YaHei" panose="020B0503020204020204" pitchFamily="34" charset="-122"/>
               </a:rPr>
+              <a:t>应用初始化事</a:t>
+            </a:r>
+            <a:r>
+              <a:rPr lang="zh-CN" altLang="en-US" sz="1200" dirty="0"/>
               <a:t>输入参数变化事件</a:t>
             </a:r>
-            <a:endParaRPr sz="1200" dirty="0">
-              <a:ea typeface="Microsoft YaHei" panose="020B0503020204020204" pitchFamily="34" charset="-122"/>
-            </a:endParaRPr>
           </a:p>
           <a:p>
             <a:pPr lvl="1"/>
@@ -11552,7 +11711,7 @@
               <a:rPr sz="1200" dirty="0" err="1">
                 <a:ea typeface="Microsoft YaHei" panose="020B0503020204020204" pitchFamily="34" charset="-122"/>
               </a:rPr>
-              <a:t>应用初始化事件</a:t>
+              <a:t>件</a:t>
             </a:r>
             <a:endParaRPr lang="en-CN" sz="1200" dirty="0">
               <a:ea typeface="Microsoft YaHei" panose="020B0503020204020204" pitchFamily="34" charset="-122"/>
